--- a/docs/Review#1.pptx
+++ b/docs/Review#1.pptx
@@ -109,6 +109,11 @@
       </a:defRPr>
     </a:lvl9pPr>
   </p:defaultTextStyle>
+  <p:extLst>
+    <p:ext uri="{EFAFB233-063F-42B5-8137-9DF3F51BA10A}">
+      <p15:sldGuideLst xmlns:p15="http://schemas.microsoft.com/office/powerpoint/2012/main"/>
+    </p:ext>
+  </p:extLst>
 </p:presentation>
 </file>
 
@@ -259,7 +264,7 @@
           <a:p>
             <a:fld id="{6F939AD6-5CD6-4FE6-B9EF-513827BCAC11}" type="datetimeFigureOut">
               <a:rPr lang="de-DE" smtClean="0"/>
-              <a:t>14.10.2026</a:t>
+              <a:t>15.10.2026</a:t>
             </a:fld>
             <a:endParaRPr lang="de-DE"/>
           </a:p>
@@ -457,7 +462,7 @@
           <a:p>
             <a:fld id="{6F939AD6-5CD6-4FE6-B9EF-513827BCAC11}" type="datetimeFigureOut">
               <a:rPr lang="de-DE" smtClean="0"/>
-              <a:t>14.10.2026</a:t>
+              <a:t>15.10.2026</a:t>
             </a:fld>
             <a:endParaRPr lang="de-DE"/>
           </a:p>
@@ -665,7 +670,7 @@
           <a:p>
             <a:fld id="{6F939AD6-5CD6-4FE6-B9EF-513827BCAC11}" type="datetimeFigureOut">
               <a:rPr lang="de-DE" smtClean="0"/>
-              <a:t>14.10.2026</a:t>
+              <a:t>15.10.2026</a:t>
             </a:fld>
             <a:endParaRPr lang="de-DE"/>
           </a:p>
@@ -863,7 +868,7 @@
           <a:p>
             <a:fld id="{6F939AD6-5CD6-4FE6-B9EF-513827BCAC11}" type="datetimeFigureOut">
               <a:rPr lang="de-DE" smtClean="0"/>
-              <a:t>14.10.2026</a:t>
+              <a:t>15.10.2026</a:t>
             </a:fld>
             <a:endParaRPr lang="de-DE"/>
           </a:p>
@@ -1138,7 +1143,7 @@
           <a:p>
             <a:fld id="{6F939AD6-5CD6-4FE6-B9EF-513827BCAC11}" type="datetimeFigureOut">
               <a:rPr lang="de-DE" smtClean="0"/>
-              <a:t>14.10.2026</a:t>
+              <a:t>15.10.2026</a:t>
             </a:fld>
             <a:endParaRPr lang="de-DE"/>
           </a:p>
@@ -1403,7 +1408,7 @@
           <a:p>
             <a:fld id="{6F939AD6-5CD6-4FE6-B9EF-513827BCAC11}" type="datetimeFigureOut">
               <a:rPr lang="de-DE" smtClean="0"/>
-              <a:t>14.10.2026</a:t>
+              <a:t>15.10.2026</a:t>
             </a:fld>
             <a:endParaRPr lang="de-DE"/>
           </a:p>
@@ -1815,7 +1820,7 @@
           <a:p>
             <a:fld id="{6F939AD6-5CD6-4FE6-B9EF-513827BCAC11}" type="datetimeFigureOut">
               <a:rPr lang="de-DE" smtClean="0"/>
-              <a:t>14.10.2026</a:t>
+              <a:t>15.10.2026</a:t>
             </a:fld>
             <a:endParaRPr lang="de-DE"/>
           </a:p>
@@ -1956,7 +1961,7 @@
           <a:p>
             <a:fld id="{6F939AD6-5CD6-4FE6-B9EF-513827BCAC11}" type="datetimeFigureOut">
               <a:rPr lang="de-DE" smtClean="0"/>
-              <a:t>14.10.2026</a:t>
+              <a:t>15.10.2026</a:t>
             </a:fld>
             <a:endParaRPr lang="de-DE"/>
           </a:p>
@@ -2069,7 +2074,7 @@
           <a:p>
             <a:fld id="{6F939AD6-5CD6-4FE6-B9EF-513827BCAC11}" type="datetimeFigureOut">
               <a:rPr lang="de-DE" smtClean="0"/>
-              <a:t>14.10.2026</a:t>
+              <a:t>15.10.2026</a:t>
             </a:fld>
             <a:endParaRPr lang="de-DE"/>
           </a:p>
@@ -2380,7 +2385,7 @@
           <a:p>
             <a:fld id="{6F939AD6-5CD6-4FE6-B9EF-513827BCAC11}" type="datetimeFigureOut">
               <a:rPr lang="de-DE" smtClean="0"/>
-              <a:t>14.10.2026</a:t>
+              <a:t>15.10.2026</a:t>
             </a:fld>
             <a:endParaRPr lang="de-DE"/>
           </a:p>
@@ -2668,7 +2673,7 @@
           <a:p>
             <a:fld id="{6F939AD6-5CD6-4FE6-B9EF-513827BCAC11}" type="datetimeFigureOut">
               <a:rPr lang="de-DE" smtClean="0"/>
-              <a:t>14.10.2026</a:t>
+              <a:t>15.10.2026</a:t>
             </a:fld>
             <a:endParaRPr lang="de-DE"/>
           </a:p>
@@ -2909,7 +2914,7 @@
           <a:p>
             <a:fld id="{6F939AD6-5CD6-4FE6-B9EF-513827BCAC11}" type="datetimeFigureOut">
               <a:rPr lang="de-DE" smtClean="0"/>
-              <a:t>14.10.2026</a:t>
+              <a:t>15.10.2026</a:t>
             </a:fld>
             <a:endParaRPr lang="de-DE"/>
           </a:p>
@@ -3783,14 +3788,14 @@
           <p:nvPr>
             <p:extLst>
               <p:ext uri="{D42A27DB-BD31-4B8C-83A1-F6EECF244321}">
-                <p14:modId xmlns:p14="http://schemas.microsoft.com/office/powerpoint/2010/main" val="1462767538"/>
+                <p14:modId xmlns:p14="http://schemas.microsoft.com/office/powerpoint/2010/main" val="183631810"/>
               </p:ext>
             </p:extLst>
           </p:nvPr>
         </p:nvGraphicFramePr>
         <p:xfrm>
-          <a:off x="1022350" y="1538288"/>
-          <a:ext cx="9836152" cy="2839720"/>
+          <a:off x="1177924" y="2192020"/>
+          <a:ext cx="9836152" cy="2473960"/>
         </p:xfrm>
         <a:graphic>
           <a:graphicData uri="http://schemas.openxmlformats.org/drawingml/2006/table">
@@ -4032,53 +4037,6 @@
                   </a:ext>
                 </a:extLst>
               </a:tr>
-              <a:tr h="337502">
-                <a:tc>
-                  <a:txBody>
-                    <a:bodyPr/>
-                    <a:lstStyle/>
-                    <a:p>
-                      <a:endParaRPr lang="de-DE" dirty="0"/>
-                    </a:p>
-                  </a:txBody>
-                  <a:tcPr/>
-                </a:tc>
-                <a:tc>
-                  <a:txBody>
-                    <a:bodyPr/>
-                    <a:lstStyle/>
-                    <a:p>
-                      <a:endParaRPr lang="de-DE" dirty="0"/>
-                    </a:p>
-                  </a:txBody>
-                  <a:tcPr/>
-                </a:tc>
-                <a:tc>
-                  <a:txBody>
-                    <a:bodyPr/>
-                    <a:lstStyle/>
-                    <a:p>
-                      <a:endParaRPr lang="de-DE" dirty="0"/>
-                    </a:p>
-                  </a:txBody>
-                  <a:tcPr/>
-                </a:tc>
-                <a:tc>
-                  <a:txBody>
-                    <a:bodyPr/>
-                    <a:lstStyle/>
-                    <a:p>
-                      <a:endParaRPr lang="de-DE" dirty="0"/>
-                    </a:p>
-                  </a:txBody>
-                  <a:tcPr/>
-                </a:tc>
-                <a:extLst>
-                  <a:ext uri="{0D108BD9-81ED-4DB2-BD59-A6C34878D82A}">
-                    <a16:rowId xmlns:a16="http://schemas.microsoft.com/office/drawing/2014/main" val="1240952987"/>
-                  </a:ext>
-                </a:extLst>
-              </a:tr>
             </a:tbl>
           </a:graphicData>
         </a:graphic>
@@ -4393,7 +4351,7 @@
           <p:nvPr>
             <p:extLst>
               <p:ext uri="{D42A27DB-BD31-4B8C-83A1-F6EECF244321}">
-                <p14:modId xmlns:p14="http://schemas.microsoft.com/office/powerpoint/2010/main" val="52648652"/>
+                <p14:modId xmlns:p14="http://schemas.microsoft.com/office/powerpoint/2010/main" val="448725203"/>
               </p:ext>
             </p:extLst>
           </p:nvPr>
@@ -4698,7 +4656,7 @@
                     <a:p>
                       <a:r>
                         <a:rPr lang="de-DE" dirty="0"/>
-                        <a:t>Server noch nicht installiert; Daten schneller anpassen und API besser und schneller testen</a:t>
+                        <a:t>Server noch nicht installiert; Keine Zeit verschwenden</a:t>
                       </a:r>
                     </a:p>
                   </a:txBody>
